--- a/05_LLM_Tools/slides/5_3_Part5_LLM_slides.pptx
+++ b/05_LLM_Tools/slides/5_3_Part5_LLM_slides.pptx
@@ -1599,7 +1599,11 @@
               </a:defRPr>
             </a:pPr>
             <a:r>
-              <a:rPr sz="3200" b="0">
+              <a:rPr lang="en-US" dirty="0"/>
+              <a:t>Use of LLMs and coding agents: </a:t>
+            </a:r>
+            <a:r>
+              <a:rPr sz="3200" b="0" dirty="0">
                 <a:solidFill>
                   <a:srgbClr val="1B2944"/>
                 </a:solidFill>
@@ -1609,164 +1613,7 @@
               </a:rPr>
               <a:t>Principles and good practice</a:t>
             </a:r>
-            <a:endParaRPr sz="4267"/>
-          </a:p>
-        </p:txBody>
-      </p:sp>
-      <p:sp>
-        <p:nvSpPr>
-          <p:cNvPr id="5" name="Text 3">
-            <a:extLst>
-              <a:ext uri="{FF2B5EF4-FFF2-40B4-BE49-F238E27FC236}">
-                <a16:creationId xmlns:a16="http://schemas.microsoft.com/office/drawing/2014/main" id="{809FB515-E0B6-46AD-8614-0224DFFCCE40}"/>
-              </a:ext>
-            </a:extLst>
-          </p:cNvPr>
-          <p:cNvSpPr>
-            <a:spLocks noGrp="1"/>
-          </p:cNvSpPr>
-          <p:nvPr/>
-        </p:nvSpPr>
-        <p:spPr>
-          <a:xfrm>
-            <a:off x="433705" y="3238500"/>
-            <a:ext cx="11315700" cy="825500"/>
-          </a:xfrm>
-          <a:prstGeom prst="rect">
-            <a:avLst/>
-          </a:prstGeom>
-          <a:noFill/>
-        </p:spPr>
-        <p:txBody>
-          <a:bodyPr wrap="square" lIns="0" tIns="0" rIns="0" bIns="0" anchor="t">
-            <a:noAutofit/>
-          </a:bodyPr>
-          <a:lstStyle>
-            <a:defPPr algn="l">
-              <a:defRPr sz="2000" b="0">
-                <a:solidFill>
-                  <a:srgbClr val="1B2944"/>
-                </a:solidFill>
-                <a:latin typeface="Open Sans"/>
-                <a:ea typeface="Open Sans"/>
-                <a:cs typeface="Open Sans"/>
-              </a:defRPr>
-            </a:defPPr>
-            <a:lvl1pPr algn="l">
-              <a:defRPr sz="2000" b="0">
-                <a:solidFill>
-                  <a:srgbClr val="1B2944"/>
-                </a:solidFill>
-                <a:latin typeface="Open Sans"/>
-                <a:ea typeface="Open Sans"/>
-                <a:cs typeface="Open Sans"/>
-              </a:defRPr>
-            </a:lvl1pPr>
-            <a:lvl2pPr algn="l">
-              <a:defRPr sz="2000" b="0">
-                <a:solidFill>
-                  <a:srgbClr val="1B2944"/>
-                </a:solidFill>
-                <a:latin typeface="Open Sans"/>
-                <a:ea typeface="Open Sans"/>
-                <a:cs typeface="Open Sans"/>
-              </a:defRPr>
-            </a:lvl2pPr>
-            <a:lvl3pPr algn="l">
-              <a:defRPr sz="2000" b="0">
-                <a:solidFill>
-                  <a:srgbClr val="1B2944"/>
-                </a:solidFill>
-                <a:latin typeface="Open Sans"/>
-                <a:ea typeface="Open Sans"/>
-                <a:cs typeface="Open Sans"/>
-              </a:defRPr>
-            </a:lvl3pPr>
-            <a:lvl4pPr algn="l">
-              <a:defRPr sz="2000" b="0">
-                <a:solidFill>
-                  <a:srgbClr val="1B2944"/>
-                </a:solidFill>
-                <a:latin typeface="Open Sans"/>
-                <a:ea typeface="Open Sans"/>
-                <a:cs typeface="Open Sans"/>
-              </a:defRPr>
-            </a:lvl4pPr>
-            <a:lvl5pPr algn="l">
-              <a:defRPr sz="2000" b="0">
-                <a:solidFill>
-                  <a:srgbClr val="1B2944"/>
-                </a:solidFill>
-                <a:latin typeface="Open Sans"/>
-                <a:ea typeface="Open Sans"/>
-                <a:cs typeface="Open Sans"/>
-              </a:defRPr>
-            </a:lvl5pPr>
-            <a:lvl6pPr algn="l">
-              <a:defRPr sz="2000" b="0">
-                <a:solidFill>
-                  <a:srgbClr val="1B2944"/>
-                </a:solidFill>
-                <a:latin typeface="Open Sans"/>
-                <a:ea typeface="Open Sans"/>
-                <a:cs typeface="Open Sans"/>
-              </a:defRPr>
-            </a:lvl6pPr>
-            <a:lvl7pPr algn="l">
-              <a:defRPr sz="2000" b="0">
-                <a:solidFill>
-                  <a:srgbClr val="1B2944"/>
-                </a:solidFill>
-                <a:latin typeface="Open Sans"/>
-                <a:ea typeface="Open Sans"/>
-                <a:cs typeface="Open Sans"/>
-              </a:defRPr>
-            </a:lvl7pPr>
-            <a:lvl8pPr algn="l">
-              <a:defRPr sz="2000" b="0">
-                <a:solidFill>
-                  <a:srgbClr val="1B2944"/>
-                </a:solidFill>
-                <a:latin typeface="Open Sans"/>
-                <a:ea typeface="Open Sans"/>
-                <a:cs typeface="Open Sans"/>
-              </a:defRPr>
-            </a:lvl8pPr>
-            <a:lvl9pPr algn="l">
-              <a:defRPr sz="2000" b="0">
-                <a:solidFill>
-                  <a:srgbClr val="1B2944"/>
-                </a:solidFill>
-                <a:latin typeface="Open Sans"/>
-                <a:ea typeface="Open Sans"/>
-                <a:cs typeface="Open Sans"/>
-              </a:defRPr>
-            </a:lvl9pPr>
-          </a:lstStyle>
-          <a:p>
-            <a:pPr marL="0" indent="0" algn="l">
-              <a:buNone/>
-              <a:defRPr sz="2000" b="0">
-                <a:solidFill>
-                  <a:srgbClr val="1B2944"/>
-                </a:solidFill>
-                <a:latin typeface="Open Sans"/>
-                <a:ea typeface="Open Sans"/>
-                <a:cs typeface="Open Sans"/>
-              </a:defRPr>
-            </a:pPr>
-            <a:r>
-              <a:rPr sz="2000" b="0">
-                <a:solidFill>
-                  <a:srgbClr val="1B2944"/>
-                </a:solidFill>
-                <a:latin typeface="Open Sans"/>
-                <a:ea typeface="Open Sans"/>
-                <a:cs typeface="Open Sans"/>
-              </a:rPr>
-              <a:t>Fluent, useful, and sometimes confidently wrong</a:t>
-            </a:r>
-            <a:endParaRPr sz="2000"/>
+            <a:endParaRPr sz="4267" dirty="0"/>
           </a:p>
         </p:txBody>
       </p:sp>
@@ -2109,7 +1956,7 @@
               </a:defRPr>
             </a:pPr>
             <a:r>
-              <a:rPr sz="3000" b="0">
+              <a:rPr sz="3000" b="0" dirty="0">
                 <a:solidFill>
                   <a:srgbClr val="1B2944"/>
                 </a:solidFill>
@@ -2119,7 +1966,7 @@
               </a:rPr>
               <a:t>Strengths and weaknesses</a:t>
             </a:r>
-            <a:endParaRPr sz="3467"/>
+            <a:endParaRPr sz="3467" dirty="0"/>
           </a:p>
         </p:txBody>
       </p:sp>
@@ -2266,7 +2113,7 @@
               </a:defRPr>
             </a:pPr>
             <a:r>
-              <a:rPr sz="2100" b="0">
+              <a:rPr sz="2800" b="0">
                 <a:solidFill>
                   <a:srgbClr val="417ECE"/>
                 </a:solidFill>
@@ -2276,7 +2123,7 @@
               </a:rPr>
               <a:t>Good at</a:t>
             </a:r>
-            <a:endParaRPr sz="2000"/>
+            <a:endParaRPr sz="2800"/>
           </a:p>
         </p:txBody>
       </p:sp>
@@ -2427,7 +2274,7 @@
               </a:defRPr>
             </a:pPr>
             <a:r>
-              <a:rPr sz="1800" b="0">
+              <a:rPr sz="2000" b="0" dirty="0">
                 <a:solidFill>
                   <a:srgbClr val="1B2944"/>
                 </a:solidFill>
@@ -2437,7 +2284,7 @@
               </a:rPr>
               <a:t>drafting and rewriting text</a:t>
             </a:r>
-            <a:endParaRPr sz="1667"/>
+            <a:endParaRPr dirty="0"/>
           </a:p>
           <a:p>
             <a:pPr marL="457200" indent="-457200" algn="l">
@@ -2456,7 +2303,7 @@
               </a:defRPr>
             </a:pPr>
             <a:r>
-              <a:rPr sz="1800" b="0">
+              <a:rPr sz="2000" b="0" dirty="0">
                 <a:solidFill>
                   <a:srgbClr val="1B2944"/>
                 </a:solidFill>
@@ -2466,7 +2313,7 @@
               </a:rPr>
               <a:t>explaining concepts</a:t>
             </a:r>
-            <a:endParaRPr sz="1667"/>
+            <a:endParaRPr dirty="0"/>
           </a:p>
           <a:p>
             <a:pPr marL="457200" indent="-457200" algn="l">
@@ -2485,7 +2332,7 @@
               </a:defRPr>
             </a:pPr>
             <a:r>
-              <a:rPr sz="1800" b="0">
+              <a:rPr sz="2000" b="0" dirty="0">
                 <a:solidFill>
                   <a:srgbClr val="1B2944"/>
                 </a:solidFill>
@@ -2495,7 +2342,7 @@
               </a:rPr>
               <a:t>generating and debugging code</a:t>
             </a:r>
-            <a:endParaRPr sz="1667"/>
+            <a:endParaRPr dirty="0"/>
           </a:p>
           <a:p>
             <a:pPr marL="457200" indent="-457200" algn="l">
@@ -2514,7 +2361,7 @@
               </a:defRPr>
             </a:pPr>
             <a:r>
-              <a:rPr sz="1800" b="0">
+              <a:rPr sz="2000" b="0" dirty="0">
                 <a:solidFill>
                   <a:srgbClr val="1B2944"/>
                 </a:solidFill>
@@ -2524,7 +2371,7 @@
               </a:rPr>
               <a:t>translating between formats</a:t>
             </a:r>
-            <a:endParaRPr sz="1667"/>
+            <a:endParaRPr dirty="0"/>
           </a:p>
           <a:p>
             <a:pPr marL="457200" indent="-457200" algn="l">
@@ -2543,7 +2390,7 @@
               </a:defRPr>
             </a:pPr>
             <a:r>
-              <a:rPr sz="1800" b="0">
+              <a:rPr sz="2000" b="0" dirty="0">
                 <a:solidFill>
                   <a:srgbClr val="1B2944"/>
                 </a:solidFill>
@@ -2553,7 +2400,7 @@
               </a:rPr>
               <a:t>getting oriented quickly</a:t>
             </a:r>
-            <a:endParaRPr sz="1667"/>
+            <a:endParaRPr dirty="0"/>
           </a:p>
         </p:txBody>
       </p:sp>
@@ -2700,7 +2547,7 @@
               </a:defRPr>
             </a:pPr>
             <a:r>
-              <a:rPr sz="2100" b="0">
+              <a:rPr sz="2800" b="0">
                 <a:solidFill>
                   <a:srgbClr val="417ECE"/>
                 </a:solidFill>
@@ -2710,7 +2557,7 @@
               </a:rPr>
               <a:t>Weak at</a:t>
             </a:r>
-            <a:endParaRPr sz="2000"/>
+            <a:endParaRPr sz="2800"/>
           </a:p>
         </p:txBody>
       </p:sp>
@@ -2861,7 +2708,7 @@
               </a:defRPr>
             </a:pPr>
             <a:r>
-              <a:rPr sz="1800" b="0">
+              <a:rPr sz="2000" b="0" dirty="0">
                 <a:solidFill>
                   <a:srgbClr val="1B2944"/>
                 </a:solidFill>
@@ -2871,7 +2718,7 @@
               </a:rPr>
               <a:t>inventing facts and references</a:t>
             </a:r>
-            <a:endParaRPr sz="1667"/>
+            <a:endParaRPr dirty="0"/>
           </a:p>
           <a:p>
             <a:pPr marL="457200" indent="-457200" algn="l">
@@ -2890,7 +2737,7 @@
               </a:defRPr>
             </a:pPr>
             <a:r>
-              <a:rPr sz="1800" b="0">
+              <a:rPr sz="2000" b="0" dirty="0">
                 <a:solidFill>
                   <a:srgbClr val="1B2944"/>
                 </a:solidFill>
@@ -2900,7 +2747,7 @@
               </a:rPr>
               <a:t>sensitivity to how it is asked</a:t>
             </a:r>
-            <a:endParaRPr sz="1667"/>
+            <a:endParaRPr dirty="0"/>
           </a:p>
           <a:p>
             <a:pPr marL="457200" indent="-457200" algn="l">
@@ -2919,7 +2766,7 @@
               </a:defRPr>
             </a:pPr>
             <a:r>
-              <a:rPr sz="1800" b="0">
+              <a:rPr sz="2000" b="0" dirty="0">
                 <a:solidFill>
                   <a:srgbClr val="1B2944"/>
                 </a:solidFill>
@@ -2929,7 +2776,7 @@
               </a:rPr>
               <a:t>being subtly wrong, but fluent</a:t>
             </a:r>
-            <a:endParaRPr sz="1667"/>
+            <a:endParaRPr dirty="0"/>
           </a:p>
           <a:p>
             <a:pPr marL="457200" indent="-457200" algn="l">
@@ -2948,7 +2795,7 @@
               </a:defRPr>
             </a:pPr>
             <a:r>
-              <a:rPr sz="1800" b="0">
+              <a:rPr sz="2000" b="0" dirty="0">
                 <a:solidFill>
                   <a:srgbClr val="1B2944"/>
                 </a:solidFill>
@@ -2958,7 +2805,7 @@
               </a:rPr>
               <a:t>knowledge cutoff and gaps</a:t>
             </a:r>
-            <a:endParaRPr sz="1667"/>
+            <a:endParaRPr dirty="0"/>
           </a:p>
         </p:txBody>
       </p:sp>
@@ -3105,7 +2952,7 @@
               </a:defRPr>
             </a:pPr>
             <a:r>
-              <a:rPr sz="1500" b="0">
+              <a:rPr sz="1500" b="0" dirty="0">
                 <a:solidFill>
                   <a:srgbClr val="1B2944"/>
                 </a:solidFill>
@@ -3115,7 +2962,7 @@
               </a:rPr>
               <a:t>Example:  asked for a method's reference, an LLM may return a perfect-looking citation with a DOI that does not exist.</a:t>
             </a:r>
-            <a:endParaRPr sz="1467"/>
+            <a:endParaRPr sz="1467" dirty="0"/>
           </a:p>
         </p:txBody>
       </p:sp>
@@ -3471,42 +3318,722 @@
           </a:p>
         </p:txBody>
       </p:sp>
-      <p:pic>
-        <p:nvPicPr>
-          <p:cNvPr id="4" name="Image 0">
+      <p:sp>
+        <p:nvSpPr>
+          <p:cNvPr id="6" name="TextBox 5">
             <a:extLst>
               <a:ext uri="{FF2B5EF4-FFF2-40B4-BE49-F238E27FC236}">
-                <a16:creationId xmlns:a16="http://schemas.microsoft.com/office/drawing/2014/main" id="{2CAA91DD-A63F-4706-BF5E-3E564B352CD5}"/>
+                <a16:creationId xmlns:a16="http://schemas.microsoft.com/office/drawing/2014/main" id="{A6E9CE2C-7B6B-F88A-FF19-D8D4C029CA45}"/>
               </a:ext>
             </a:extLst>
           </p:cNvPr>
-          <p:cNvPicPr>
-            <a:picLocks noChangeAspect="1"/>
-          </p:cNvPicPr>
+          <p:cNvSpPr txBox="1"/>
           <p:nvPr/>
-        </p:nvPicPr>
-        <p:blipFill>
-          <a:blip>
-            <a:extLst>
-              <a:ext uri="{96DAC541-7B7A-43D3-8B79-37D633B846F1}">
-                <asvg:svgBlip xmlns:asvg="http://schemas.microsoft.com/office/drawing/2016/SVG/main" r:embed="rId3"/>
-              </a:ext>
-            </a:extLst>
-          </a:blip>
-          <a:stretch>
-            <a:fillRect/>
-          </a:stretch>
-        </p:blipFill>
+        </p:nvSpPr>
         <p:spPr>
           <a:xfrm>
-            <a:off x="6032500" y="1587500"/>
-            <a:ext cx="5715000" cy="3727196"/>
+            <a:off x="8155179" y="1629196"/>
+            <a:ext cx="1469640" cy="328308"/>
           </a:xfrm>
           <a:prstGeom prst="rect">
             <a:avLst/>
           </a:prstGeom>
+          <a:noFill/>
         </p:spPr>
-      </p:pic>
+        <p:txBody>
+          <a:bodyPr wrap="none" rtlCol="0">
+            <a:spAutoFit/>
+          </a:bodyPr>
+          <a:lstStyle/>
+          <a:p>
+            <a:pPr algn="l"/>
+            <a:r>
+              <a:rPr lang="en-NL" sz="1050" b="1" spc="0" baseline="0">
+                <a:ln/>
+                <a:solidFill>
+                  <a:srgbClr val="1B2944"/>
+                </a:solidFill>
+                <a:latin typeface="Open Sans"/>
+                <a:ea typeface="Open Sans"/>
+                <a:cs typeface="Open Sans"/>
+                <a:sym typeface="Open Sans"/>
+                <a:rtl val="0"/>
+              </a:rPr>
+              <a:t>The verify loop</a:t>
+            </a:r>
+          </a:p>
+        </p:txBody>
+      </p:sp>
+      <p:grpSp>
+        <p:nvGrpSpPr>
+          <p:cNvPr id="9" name="Image 0">
+            <a:extLst>
+              <a:ext uri="{FF2B5EF4-FFF2-40B4-BE49-F238E27FC236}">
+                <a16:creationId xmlns:a16="http://schemas.microsoft.com/office/drawing/2014/main" id="{A0E981BD-F9D2-D1A4-6C05-E3B444141032}"/>
+              </a:ext>
+            </a:extLst>
+          </p:cNvPr>
+          <p:cNvGrpSpPr/>
+          <p:nvPr/>
+        </p:nvGrpSpPr>
+        <p:grpSpPr>
+          <a:xfrm>
+            <a:off x="6156739" y="2084459"/>
+            <a:ext cx="5466521" cy="2683581"/>
+            <a:chOff x="6156739" y="2084459"/>
+            <a:chExt cx="5466521" cy="2683581"/>
+          </a:xfrm>
+          <a:solidFill>
+            <a:srgbClr val="417ECE"/>
+          </a:solidFill>
+        </p:grpSpPr>
+        <p:sp>
+          <p:nvSpPr>
+            <p:cNvPr id="10" name="Rectangle: Rounded Corners 9">
+              <a:extLst>
+                <a:ext uri="{FF2B5EF4-FFF2-40B4-BE49-F238E27FC236}">
+                  <a16:creationId xmlns:a16="http://schemas.microsoft.com/office/drawing/2014/main" id="{E9FAC289-BBE5-AD06-6E38-F427865A9A65}"/>
+                </a:ext>
+              </a:extLst>
+            </p:cNvPr>
+            <p:cNvSpPr/>
+            <p:nvPr/>
+          </p:nvSpPr>
+          <p:spPr>
+            <a:xfrm>
+              <a:off x="8020326" y="2084459"/>
+              <a:ext cx="1739347" cy="571503"/>
+            </a:xfrm>
+            <a:prstGeom prst="roundRect">
+              <a:avLst>
+                <a:gd name="adj" fmla="val 21739"/>
+              </a:avLst>
+            </a:prstGeom>
+            <a:solidFill>
+              <a:srgbClr val="417ECE"/>
+            </a:solidFill>
+            <a:ln w="12424" cap="flat">
+              <a:noFill/>
+              <a:prstDash val="solid"/>
+              <a:miter/>
+            </a:ln>
+          </p:spPr>
+          <p:txBody>
+            <a:bodyPr/>
+            <a:lstStyle/>
+            <a:p>
+              <a:endParaRPr lang="en-NL"/>
+            </a:p>
+          </p:txBody>
+        </p:sp>
+        <p:sp>
+          <p:nvSpPr>
+            <p:cNvPr id="11" name="Rectangle: Rounded Corners 10">
+              <a:extLst>
+                <a:ext uri="{FF2B5EF4-FFF2-40B4-BE49-F238E27FC236}">
+                  <a16:creationId xmlns:a16="http://schemas.microsoft.com/office/drawing/2014/main" id="{A29C8BE0-BFBC-5DFC-37CD-04AE322BC5DB}"/>
+                </a:ext>
+              </a:extLst>
+            </p:cNvPr>
+            <p:cNvSpPr/>
+            <p:nvPr/>
+          </p:nvSpPr>
+          <p:spPr>
+            <a:xfrm>
+              <a:off x="9759673" y="3140498"/>
+              <a:ext cx="1863586" cy="571503"/>
+            </a:xfrm>
+            <a:prstGeom prst="roundRect">
+              <a:avLst>
+                <a:gd name="adj" fmla="val 21739"/>
+              </a:avLst>
+            </a:prstGeom>
+            <a:solidFill>
+              <a:srgbClr val="417ECE"/>
+            </a:solidFill>
+            <a:ln w="12424" cap="flat">
+              <a:noFill/>
+              <a:prstDash val="solid"/>
+              <a:miter/>
+            </a:ln>
+          </p:spPr>
+          <p:txBody>
+            <a:bodyPr/>
+            <a:lstStyle/>
+            <a:p>
+              <a:endParaRPr lang="en-NL"/>
+            </a:p>
+          </p:txBody>
+        </p:sp>
+        <p:sp>
+          <p:nvSpPr>
+            <p:cNvPr id="12" name="Rectangle: Rounded Corners 11">
+              <a:extLst>
+                <a:ext uri="{FF2B5EF4-FFF2-40B4-BE49-F238E27FC236}">
+                  <a16:creationId xmlns:a16="http://schemas.microsoft.com/office/drawing/2014/main" id="{4CFEF800-3D44-B8EF-8ACE-466E8AD63F10}"/>
+                </a:ext>
+              </a:extLst>
+            </p:cNvPr>
+            <p:cNvSpPr/>
+            <p:nvPr/>
+          </p:nvSpPr>
+          <p:spPr>
+            <a:xfrm>
+              <a:off x="8020326" y="4196537"/>
+              <a:ext cx="1739347" cy="571503"/>
+            </a:xfrm>
+            <a:prstGeom prst="roundRect">
+              <a:avLst>
+                <a:gd name="adj" fmla="val 21739"/>
+              </a:avLst>
+            </a:prstGeom>
+            <a:solidFill>
+              <a:srgbClr val="417ECE"/>
+            </a:solidFill>
+            <a:ln w="12424" cap="flat">
+              <a:noFill/>
+              <a:prstDash val="solid"/>
+              <a:miter/>
+            </a:ln>
+          </p:spPr>
+          <p:txBody>
+            <a:bodyPr/>
+            <a:lstStyle/>
+            <a:p>
+              <a:endParaRPr lang="en-NL"/>
+            </a:p>
+          </p:txBody>
+        </p:sp>
+        <p:sp>
+          <p:nvSpPr>
+            <p:cNvPr id="13" name="Rectangle: Rounded Corners 12">
+              <a:extLst>
+                <a:ext uri="{FF2B5EF4-FFF2-40B4-BE49-F238E27FC236}">
+                  <a16:creationId xmlns:a16="http://schemas.microsoft.com/office/drawing/2014/main" id="{9E19E444-2BF2-488F-B7E5-1329BED7F7A3}"/>
+                </a:ext>
+              </a:extLst>
+            </p:cNvPr>
+            <p:cNvSpPr/>
+            <p:nvPr/>
+          </p:nvSpPr>
+          <p:spPr>
+            <a:xfrm>
+              <a:off x="6156739" y="3140498"/>
+              <a:ext cx="1863586" cy="571503"/>
+            </a:xfrm>
+            <a:prstGeom prst="roundRect">
+              <a:avLst>
+                <a:gd name="adj" fmla="val 21739"/>
+              </a:avLst>
+            </a:prstGeom>
+            <a:solidFill>
+              <a:srgbClr val="417ECE"/>
+            </a:solidFill>
+            <a:ln w="12424" cap="flat">
+              <a:noFill/>
+              <a:prstDash val="solid"/>
+              <a:miter/>
+            </a:ln>
+          </p:spPr>
+          <p:txBody>
+            <a:bodyPr/>
+            <a:lstStyle/>
+            <a:p>
+              <a:endParaRPr lang="en-NL"/>
+            </a:p>
+          </p:txBody>
+        </p:sp>
+      </p:grpSp>
+      <p:grpSp>
+        <p:nvGrpSpPr>
+          <p:cNvPr id="14" name="Image 0">
+            <a:extLst>
+              <a:ext uri="{FF2B5EF4-FFF2-40B4-BE49-F238E27FC236}">
+                <a16:creationId xmlns:a16="http://schemas.microsoft.com/office/drawing/2014/main" id="{DB9C7F51-7959-3B0E-E079-8EF7D072FAE9}"/>
+              </a:ext>
+            </a:extLst>
+          </p:cNvPr>
+          <p:cNvGrpSpPr/>
+          <p:nvPr/>
+        </p:nvGrpSpPr>
+        <p:grpSpPr>
+          <a:xfrm>
+            <a:off x="6720716" y="2259699"/>
+            <a:ext cx="4485605" cy="2332027"/>
+            <a:chOff x="6720716" y="2259699"/>
+            <a:chExt cx="4485605" cy="2332027"/>
+          </a:xfrm>
+          <a:solidFill>
+            <a:srgbClr val="FFFFFF"/>
+          </a:solidFill>
+        </p:grpSpPr>
+        <p:sp>
+          <p:nvSpPr>
+            <p:cNvPr id="15" name="TextBox 14">
+              <a:extLst>
+                <a:ext uri="{FF2B5EF4-FFF2-40B4-BE49-F238E27FC236}">
+                  <a16:creationId xmlns:a16="http://schemas.microsoft.com/office/drawing/2014/main" id="{853319A3-F4B5-4B61-0F6F-A2EC7094A185}"/>
+                </a:ext>
+              </a:extLst>
+            </p:cNvPr>
+            <p:cNvSpPr txBox="1"/>
+            <p:nvPr/>
+          </p:nvSpPr>
+          <p:spPr>
+            <a:xfrm>
+              <a:off x="8405626" y="2213979"/>
+              <a:ext cx="968747" cy="311389"/>
+            </a:xfrm>
+            <a:prstGeom prst="rect">
+              <a:avLst/>
+            </a:prstGeom>
+            <a:noFill/>
+          </p:spPr>
+          <p:txBody>
+            <a:bodyPr wrap="none" rtlCol="0">
+              <a:spAutoFit/>
+            </a:bodyPr>
+            <a:lstStyle/>
+            <a:p>
+              <a:pPr algn="l"/>
+              <a:r>
+                <a:rPr lang="en-NL" sz="975" b="1" spc="0" baseline="0">
+                  <a:ln/>
+                  <a:solidFill>
+                    <a:srgbClr val="FFFFFF"/>
+                  </a:solidFill>
+                  <a:latin typeface="Open Sans"/>
+                  <a:ea typeface="Open Sans"/>
+                  <a:cs typeface="Open Sans"/>
+                  <a:sym typeface="Open Sans"/>
+                  <a:rtl val="0"/>
+                </a:rPr>
+                <a:t>1. Prompt</a:t>
+              </a:r>
+            </a:p>
+          </p:txBody>
+        </p:sp>
+        <p:sp>
+          <p:nvSpPr>
+            <p:cNvPr id="16" name="TextBox 15">
+              <a:extLst>
+                <a:ext uri="{FF2B5EF4-FFF2-40B4-BE49-F238E27FC236}">
+                  <a16:creationId xmlns:a16="http://schemas.microsoft.com/office/drawing/2014/main" id="{8CF0C5DC-82D2-26A8-E568-E102409DDC90}"/>
+                </a:ext>
+              </a:extLst>
+            </p:cNvPr>
+            <p:cNvSpPr txBox="1"/>
+            <p:nvPr/>
+          </p:nvSpPr>
+          <p:spPr>
+            <a:xfrm>
+              <a:off x="10085172" y="3270018"/>
+              <a:ext cx="1212590" cy="311389"/>
+            </a:xfrm>
+            <a:prstGeom prst="rect">
+              <a:avLst/>
+            </a:prstGeom>
+            <a:noFill/>
+          </p:spPr>
+          <p:txBody>
+            <a:bodyPr wrap="none" rtlCol="0">
+              <a:spAutoFit/>
+            </a:bodyPr>
+            <a:lstStyle/>
+            <a:p>
+              <a:pPr algn="l"/>
+              <a:r>
+                <a:rPr lang="en-NL" sz="975" b="1" spc="0" baseline="0">
+                  <a:ln/>
+                  <a:solidFill>
+                    <a:srgbClr val="FFFFFF"/>
+                  </a:solidFill>
+                  <a:latin typeface="Open Sans"/>
+                  <a:ea typeface="Open Sans"/>
+                  <a:cs typeface="Open Sans"/>
+                  <a:sym typeface="Open Sans"/>
+                  <a:rtl val="0"/>
+                </a:rPr>
+                <a:t>2. Read draft</a:t>
+              </a:r>
+            </a:p>
+          </p:txBody>
+        </p:sp>
+        <p:sp>
+          <p:nvSpPr>
+            <p:cNvPr id="17" name="TextBox 16">
+              <a:extLst>
+                <a:ext uri="{FF2B5EF4-FFF2-40B4-BE49-F238E27FC236}">
+                  <a16:creationId xmlns:a16="http://schemas.microsoft.com/office/drawing/2014/main" id="{99D39EBF-8117-317F-9E71-314BE11B01B4}"/>
+                </a:ext>
+              </a:extLst>
+            </p:cNvPr>
+            <p:cNvSpPr txBox="1"/>
+            <p:nvPr/>
+          </p:nvSpPr>
+          <p:spPr>
+            <a:xfrm>
+              <a:off x="8469741" y="4326057"/>
+              <a:ext cx="840516" cy="311389"/>
+            </a:xfrm>
+            <a:prstGeom prst="rect">
+              <a:avLst/>
+            </a:prstGeom>
+            <a:noFill/>
+          </p:spPr>
+          <p:txBody>
+            <a:bodyPr wrap="none" rtlCol="0">
+              <a:spAutoFit/>
+            </a:bodyPr>
+            <a:lstStyle/>
+            <a:p>
+              <a:pPr algn="l"/>
+              <a:r>
+                <a:rPr lang="en-NL" sz="975" b="1" spc="0" baseline="0">
+                  <a:ln/>
+                  <a:solidFill>
+                    <a:srgbClr val="FFFFFF"/>
+                  </a:solidFill>
+                  <a:latin typeface="Open Sans"/>
+                  <a:ea typeface="Open Sans"/>
+                  <a:cs typeface="Open Sans"/>
+                  <a:sym typeface="Open Sans"/>
+                  <a:rtl val="0"/>
+                </a:rPr>
+                <a:t>3. Verify</a:t>
+              </a:r>
+            </a:p>
+          </p:txBody>
+        </p:sp>
+        <p:sp>
+          <p:nvSpPr>
+            <p:cNvPr id="18" name="TextBox 17">
+              <a:extLst>
+                <a:ext uri="{FF2B5EF4-FFF2-40B4-BE49-F238E27FC236}">
+                  <a16:creationId xmlns:a16="http://schemas.microsoft.com/office/drawing/2014/main" id="{179F0A20-4B7F-6675-6F99-EE6AD563AB33}"/>
+                </a:ext>
+              </a:extLst>
+            </p:cNvPr>
+            <p:cNvSpPr txBox="1"/>
+            <p:nvPr/>
+          </p:nvSpPr>
+          <p:spPr>
+            <a:xfrm>
+              <a:off x="6629276" y="3270018"/>
+              <a:ext cx="918511" cy="311389"/>
+            </a:xfrm>
+            <a:prstGeom prst="rect">
+              <a:avLst/>
+            </a:prstGeom>
+            <a:noFill/>
+          </p:spPr>
+          <p:txBody>
+            <a:bodyPr wrap="none" rtlCol="0">
+              <a:spAutoFit/>
+            </a:bodyPr>
+            <a:lstStyle/>
+            <a:p>
+              <a:pPr algn="l"/>
+              <a:r>
+                <a:rPr lang="en-NL" sz="975" b="1" spc="0" baseline="0">
+                  <a:ln/>
+                  <a:solidFill>
+                    <a:srgbClr val="FFFFFF"/>
+                  </a:solidFill>
+                  <a:latin typeface="Open Sans"/>
+                  <a:ea typeface="Open Sans"/>
+                  <a:cs typeface="Open Sans"/>
+                  <a:sym typeface="Open Sans"/>
+                  <a:rtl val="0"/>
+                </a:rPr>
+                <a:t>4. Iterate</a:t>
+              </a:r>
+            </a:p>
+          </p:txBody>
+        </p:sp>
+      </p:grpSp>
+      <p:grpSp>
+        <p:nvGrpSpPr>
+          <p:cNvPr id="19" name="Image 0">
+            <a:extLst>
+              <a:ext uri="{FF2B5EF4-FFF2-40B4-BE49-F238E27FC236}">
+                <a16:creationId xmlns:a16="http://schemas.microsoft.com/office/drawing/2014/main" id="{43135256-9647-7415-67C8-A40CCB5526AE}"/>
+              </a:ext>
+            </a:extLst>
+          </p:cNvPr>
+          <p:cNvGrpSpPr/>
+          <p:nvPr/>
+        </p:nvGrpSpPr>
+        <p:grpSpPr>
+          <a:xfrm>
+            <a:off x="6864693" y="2370211"/>
+            <a:ext cx="4050613" cy="2112077"/>
+            <a:chOff x="6864693" y="2370211"/>
+            <a:chExt cx="4050613" cy="2112077"/>
+          </a:xfrm>
+          <a:noFill/>
+        </p:grpSpPr>
+        <p:sp>
+          <p:nvSpPr>
+            <p:cNvPr id="20" name="Freeform: Shape 19">
+              <a:extLst>
+                <a:ext uri="{FF2B5EF4-FFF2-40B4-BE49-F238E27FC236}">
+                  <a16:creationId xmlns:a16="http://schemas.microsoft.com/office/drawing/2014/main" id="{6DA92B9C-B79B-534C-B444-D20240FB0861}"/>
+                </a:ext>
+              </a:extLst>
+            </p:cNvPr>
+            <p:cNvSpPr/>
+            <p:nvPr/>
+          </p:nvSpPr>
+          <p:spPr>
+            <a:xfrm>
+              <a:off x="9759673" y="2370211"/>
+              <a:ext cx="1155632" cy="745439"/>
+            </a:xfrm>
+            <a:custGeom>
+              <a:avLst/>
+              <a:gdLst>
+                <a:gd name="csX0" fmla="*/ 0 w 1155632"/>
+                <a:gd name="csY0" fmla="*/ 0 h 745439"/>
+                <a:gd name="csX1" fmla="*/ 1143000 w 1155632"/>
+                <a:gd name="csY1" fmla="*/ 745439 h 745439"/>
+              </a:gdLst>
+              <a:ahLst/>
+              <a:cxnLst>
+                <a:cxn ang="0">
+                  <a:pos x="csX0" y="csY0"/>
+                </a:cxn>
+                <a:cxn ang="0">
+                  <a:pos x="csX1" y="csY1"/>
+                </a:cxn>
+              </a:cxnLst>
+              <a:rect l="l" t="t" r="r" b="b"/>
+              <a:pathLst>
+                <a:path w="1155632" h="745439">
+                  <a:moveTo>
+                    <a:pt x="0" y="0"/>
+                  </a:moveTo>
+                  <a:cubicBezTo>
+                    <a:pt x="745435" y="149088"/>
+                    <a:pt x="1242391" y="397568"/>
+                    <a:pt x="1143000" y="745439"/>
+                  </a:cubicBezTo>
+                </a:path>
+              </a:pathLst>
+            </a:custGeom>
+            <a:noFill/>
+            <a:ln w="27333" cap="flat">
+              <a:solidFill>
+                <a:srgbClr val="7A7C83"/>
+              </a:solidFill>
+              <a:prstDash val="solid"/>
+              <a:miter/>
+            </a:ln>
+          </p:spPr>
+          <p:txBody>
+            <a:bodyPr/>
+            <a:lstStyle/>
+            <a:p>
+              <a:endParaRPr lang="en-NL"/>
+            </a:p>
+          </p:txBody>
+        </p:sp>
+        <p:sp>
+          <p:nvSpPr>
+            <p:cNvPr id="21" name="Freeform: Shape 20">
+              <a:extLst>
+                <a:ext uri="{FF2B5EF4-FFF2-40B4-BE49-F238E27FC236}">
+                  <a16:creationId xmlns:a16="http://schemas.microsoft.com/office/drawing/2014/main" id="{98D091F2-6AA3-4B2D-F88B-AB47C7E7D1D0}"/>
+                </a:ext>
+              </a:extLst>
+            </p:cNvPr>
+            <p:cNvSpPr/>
+            <p:nvPr/>
+          </p:nvSpPr>
+          <p:spPr>
+            <a:xfrm>
+              <a:off x="9783344" y="3712001"/>
+              <a:ext cx="721764" cy="658471"/>
+            </a:xfrm>
+            <a:custGeom>
+              <a:avLst/>
+              <a:gdLst>
+                <a:gd name="csX0" fmla="*/ 721764 w 721764"/>
+                <a:gd name="csY0" fmla="*/ 0 h 658471"/>
+                <a:gd name="csX1" fmla="*/ 1177 w 721764"/>
+                <a:gd name="csY1" fmla="*/ 658471 h 658471"/>
+              </a:gdLst>
+              <a:ahLst/>
+              <a:cxnLst>
+                <a:cxn ang="0">
+                  <a:pos x="csX0" y="csY0"/>
+                </a:cxn>
+                <a:cxn ang="0">
+                  <a:pos x="csX1" y="csY1"/>
+                </a:cxn>
+              </a:cxnLst>
+              <a:rect l="l" t="t" r="r" b="b"/>
+              <a:pathLst>
+                <a:path w="721764" h="658471">
+                  <a:moveTo>
+                    <a:pt x="721764" y="0"/>
+                  </a:moveTo>
+                  <a:cubicBezTo>
+                    <a:pt x="349047" y="360296"/>
+                    <a:pt x="-23671" y="509383"/>
+                    <a:pt x="1177" y="658471"/>
+                  </a:cubicBezTo>
+                </a:path>
+              </a:pathLst>
+            </a:custGeom>
+            <a:noFill/>
+            <a:ln w="27333" cap="flat">
+              <a:solidFill>
+                <a:srgbClr val="7A7C83"/>
+              </a:solidFill>
+              <a:prstDash val="solid"/>
+              <a:miter/>
+            </a:ln>
+          </p:spPr>
+          <p:txBody>
+            <a:bodyPr/>
+            <a:lstStyle/>
+            <a:p>
+              <a:endParaRPr lang="en-NL"/>
+            </a:p>
+          </p:txBody>
+        </p:sp>
+        <p:sp>
+          <p:nvSpPr>
+            <p:cNvPr id="22" name="Freeform: Shape 21">
+              <a:extLst>
+                <a:ext uri="{FF2B5EF4-FFF2-40B4-BE49-F238E27FC236}">
+                  <a16:creationId xmlns:a16="http://schemas.microsoft.com/office/drawing/2014/main" id="{1FD3085B-A815-DF1A-4D28-B192000EC244}"/>
+                </a:ext>
+              </a:extLst>
+            </p:cNvPr>
+            <p:cNvSpPr/>
+            <p:nvPr/>
+          </p:nvSpPr>
+          <p:spPr>
+            <a:xfrm>
+              <a:off x="6864693" y="3736849"/>
+              <a:ext cx="1155632" cy="745439"/>
+            </a:xfrm>
+            <a:custGeom>
+              <a:avLst/>
+              <a:gdLst>
+                <a:gd name="csX0" fmla="*/ 1155633 w 1155632"/>
+                <a:gd name="csY0" fmla="*/ 745439 h 745439"/>
+                <a:gd name="csX1" fmla="*/ 12633 w 1155632"/>
+                <a:gd name="csY1" fmla="*/ 0 h 745439"/>
+              </a:gdLst>
+              <a:ahLst/>
+              <a:cxnLst>
+                <a:cxn ang="0">
+                  <a:pos x="csX0" y="csY0"/>
+                </a:cxn>
+                <a:cxn ang="0">
+                  <a:pos x="csX1" y="csY1"/>
+                </a:cxn>
+              </a:cxnLst>
+              <a:rect l="l" t="t" r="r" b="b"/>
+              <a:pathLst>
+                <a:path w="1155632" h="745439">
+                  <a:moveTo>
+                    <a:pt x="1155633" y="745439"/>
+                  </a:moveTo>
+                  <a:cubicBezTo>
+                    <a:pt x="410198" y="596351"/>
+                    <a:pt x="-86758" y="347872"/>
+                    <a:pt x="12633" y="0"/>
+                  </a:cubicBezTo>
+                </a:path>
+              </a:pathLst>
+            </a:custGeom>
+            <a:noFill/>
+            <a:ln w="27333" cap="flat">
+              <a:solidFill>
+                <a:srgbClr val="7A7C83"/>
+              </a:solidFill>
+              <a:prstDash val="solid"/>
+              <a:miter/>
+            </a:ln>
+          </p:spPr>
+          <p:txBody>
+            <a:bodyPr/>
+            <a:lstStyle/>
+            <a:p>
+              <a:endParaRPr lang="en-NL"/>
+            </a:p>
+          </p:txBody>
+        </p:sp>
+        <p:sp>
+          <p:nvSpPr>
+            <p:cNvPr id="23" name="Freeform: Shape 22">
+              <a:extLst>
+                <a:ext uri="{FF2B5EF4-FFF2-40B4-BE49-F238E27FC236}">
+                  <a16:creationId xmlns:a16="http://schemas.microsoft.com/office/drawing/2014/main" id="{9549308D-8179-F1CA-C975-EF9A52E30AEF}"/>
+                </a:ext>
+              </a:extLst>
+            </p:cNvPr>
+            <p:cNvSpPr/>
+            <p:nvPr/>
+          </p:nvSpPr>
+          <p:spPr>
+            <a:xfrm>
+              <a:off x="7088532" y="2419907"/>
+              <a:ext cx="906945" cy="720591"/>
+            </a:xfrm>
+            <a:custGeom>
+              <a:avLst/>
+              <a:gdLst>
+                <a:gd name="csX0" fmla="*/ 0 w 906945"/>
+                <a:gd name="csY0" fmla="*/ 720591 h 720591"/>
+                <a:gd name="csX1" fmla="*/ 906946 w 906945"/>
+                <a:gd name="csY1" fmla="*/ 0 h 720591"/>
+              </a:gdLst>
+              <a:ahLst/>
+              <a:cxnLst>
+                <a:cxn ang="0">
+                  <a:pos x="csX0" y="csY0"/>
+                </a:cxn>
+                <a:cxn ang="0">
+                  <a:pos x="csX1" y="csY1"/>
+                </a:cxn>
+              </a:cxnLst>
+              <a:rect l="l" t="t" r="r" b="b"/>
+              <a:pathLst>
+                <a:path w="906945" h="720591">
+                  <a:moveTo>
+                    <a:pt x="0" y="720591"/>
+                  </a:moveTo>
+                  <a:cubicBezTo>
+                    <a:pt x="186359" y="347872"/>
+                    <a:pt x="683315" y="99392"/>
+                    <a:pt x="906946" y="0"/>
+                  </a:cubicBezTo>
+                </a:path>
+              </a:pathLst>
+            </a:custGeom>
+            <a:noFill/>
+            <a:ln w="27333" cap="flat">
+              <a:solidFill>
+                <a:srgbClr val="7A7C83"/>
+              </a:solidFill>
+              <a:prstDash val="solid"/>
+              <a:miter/>
+            </a:ln>
+          </p:spPr>
+          <p:txBody>
+            <a:bodyPr/>
+            <a:lstStyle/>
+            <a:p>
+              <a:endParaRPr lang="en-NL"/>
+            </a:p>
+          </p:txBody>
+        </p:sp>
+      </p:grpSp>
       <p:sp>
         <p:nvSpPr>
           <p:cNvPr id="5" name="Text 2">
@@ -3650,7 +4177,7 @@
               </a:defRPr>
             </a:pPr>
             <a:r>
-              <a:rPr sz="1800" b="0">
+              <a:rPr sz="1800" b="0" dirty="0">
                 <a:solidFill>
                   <a:srgbClr val="1B2944"/>
                 </a:solidFill>
@@ -3660,7 +4187,7 @@
               </a:rPr>
               <a:t>The model has no notion of truth; it produces what is likely.</a:t>
             </a:r>
-            <a:endParaRPr sz="1733"/>
+            <a:endParaRPr sz="1733" dirty="0"/>
           </a:p>
           <a:p>
             <a:pPr marL="0" indent="0" algn="l">
@@ -3674,7 +4201,7 @@
                 <a:cs typeface="Open Sans"/>
               </a:defRPr>
             </a:pPr>
-            <a:endParaRPr sz="1733"/>
+            <a:endParaRPr sz="1733" dirty="0"/>
           </a:p>
           <a:p>
             <a:pPr marL="0" indent="0" algn="l">
@@ -3689,7 +4216,7 @@
               </a:defRPr>
             </a:pPr>
             <a:r>
-              <a:rPr sz="1800" b="0">
+              <a:rPr sz="1800" b="0" dirty="0">
                 <a:solidFill>
                   <a:srgbClr val="1B2944"/>
                 </a:solidFill>
@@ -3700,7 +4227,7 @@
               <a:t>So every output that matters is verified independently: </a:t>
             </a:r>
             <a:r>
-              <a:rPr sz="1800" b="0">
+              <a:rPr sz="1800" b="0" dirty="0">
                 <a:solidFill>
                   <a:srgbClr val="417ECE"/>
                 </a:solidFill>
@@ -3710,7 +4237,7 @@
               </a:rPr>
               <a:t>run the code, check the reference exists, confirm the number against the data.</a:t>
             </a:r>
-            <a:endParaRPr sz="1733"/>
+            <a:endParaRPr sz="1733" dirty="0"/>
           </a:p>
           <a:p>
             <a:pPr marL="0" indent="0" algn="l">
@@ -3724,7 +4251,7 @@
                 <a:cs typeface="Open Sans"/>
               </a:defRPr>
             </a:pPr>
-            <a:endParaRPr sz="1733"/>
+            <a:endParaRPr sz="1733" dirty="0"/>
           </a:p>
           <a:p>
             <a:pPr marL="0" indent="0" algn="l">
@@ -3739,7 +4266,7 @@
               </a:defRPr>
             </a:pPr>
             <a:r>
-              <a:rPr sz="1800" b="0">
+              <a:rPr sz="1800" b="0" dirty="0">
                 <a:solidFill>
                   <a:srgbClr val="1B2944"/>
                 </a:solidFill>
@@ -3747,9 +4274,20 @@
                 <a:ea typeface="Open Sans"/>
                 <a:cs typeface="Open Sans"/>
               </a:rPr>
-              <a:t>The draft is the model's; the verification is yours.</a:t>
+              <a:t>The draft is the model's; the verification is yours</a:t>
             </a:r>
-            <a:endParaRPr sz="1733"/>
+            <a:r>
+              <a:rPr lang="en-US" sz="1800" b="0" dirty="0">
+                <a:solidFill>
+                  <a:srgbClr val="1B2944"/>
+                </a:solidFill>
+                <a:latin typeface="Open Sans"/>
+                <a:ea typeface="Open Sans"/>
+                <a:cs typeface="Open Sans"/>
+              </a:rPr>
+              <a:t>!</a:t>
+            </a:r>
+            <a:endParaRPr sz="1733" dirty="0"/>
           </a:p>
         </p:txBody>
       </p:sp>
@@ -3896,7 +4434,7 @@
               </a:defRPr>
             </a:pPr>
             <a:r>
-              <a:rPr sz="1500" b="0">
+              <a:rPr sz="1500" b="0" dirty="0">
                 <a:solidFill>
                   <a:srgbClr val="1B2944"/>
                 </a:solidFill>
@@ -3906,7 +4444,7 @@
               </a:rPr>
               <a:t>Example:  an LLM writes a peptide-mass function; you test it on a peptide whose mass you know before trusting it.</a:t>
             </a:r>
-            <a:endParaRPr sz="1467"/>
+            <a:endParaRPr sz="1467" dirty="0"/>
           </a:p>
         </p:txBody>
       </p:sp>
@@ -4441,7 +4979,7 @@
               </a:defRPr>
             </a:pPr>
             <a:r>
-              <a:rPr sz="1800" b="0">
+              <a:rPr sz="1800" b="0" dirty="0">
                 <a:solidFill>
                   <a:srgbClr val="1B2944"/>
                 </a:solidFill>
@@ -4451,7 +4989,7 @@
               </a:rPr>
               <a:t>The quality of the answer depends on the prompt.</a:t>
             </a:r>
-            <a:endParaRPr sz="1733"/>
+            <a:endParaRPr sz="1733" dirty="0"/>
           </a:p>
           <a:p>
             <a:pPr marL="0" indent="0" algn="l">
@@ -4465,7 +5003,7 @@
                 <a:cs typeface="Open Sans"/>
               </a:defRPr>
             </a:pPr>
-            <a:endParaRPr sz="1733"/>
+            <a:endParaRPr sz="1733" dirty="0"/>
           </a:p>
           <a:p>
             <a:pPr marL="0" indent="0" algn="l">
@@ -4480,7 +5018,7 @@
               </a:defRPr>
             </a:pPr>
             <a:r>
-              <a:rPr sz="1800" b="0">
+              <a:rPr sz="1800" b="0" dirty="0">
                 <a:solidFill>
                   <a:srgbClr val="1B2944"/>
                 </a:solidFill>
@@ -4490,7 +5028,7 @@
               </a:rPr>
               <a:t>Give context, state the goal precisely, supply an example, specify the format and length, and ask for steps when useful. Iterating on the prompt is normal.</a:t>
             </a:r>
-            <a:endParaRPr sz="1733"/>
+            <a:endParaRPr sz="1733" dirty="0"/>
           </a:p>
         </p:txBody>
       </p:sp>
@@ -5499,7 +6037,7 @@
               </a:defRPr>
             </a:pPr>
             <a:r>
-              <a:rPr sz="3000" b="0">
+              <a:rPr sz="3600" b="0" dirty="0">
                 <a:solidFill>
                   <a:srgbClr val="1B2944"/>
                 </a:solidFill>
@@ -5509,7 +6047,7 @@
               </a:rPr>
               <a:t>Code generation</a:t>
             </a:r>
-            <a:endParaRPr sz="3467"/>
+            <a:endParaRPr sz="4000" dirty="0"/>
           </a:p>
         </p:txBody>
       </p:sp>
@@ -5656,7 +6194,7 @@
               </a:defRPr>
             </a:pPr>
             <a:r>
-              <a:rPr sz="2000" b="0">
+              <a:rPr sz="2800" b="0" dirty="0">
                 <a:solidFill>
                   <a:srgbClr val="417ECE"/>
                 </a:solidFill>
@@ -5666,7 +6204,7 @@
               </a:rPr>
               <a:t>The most reliable scientific use: generate code you then run and test.</a:t>
             </a:r>
-            <a:endParaRPr sz="1867"/>
+            <a:endParaRPr sz="2400" dirty="0"/>
           </a:p>
           <a:p>
             <a:pPr marL="0" indent="0" algn="l">
@@ -5680,7 +6218,7 @@
                 <a:cs typeface="Open Sans"/>
               </a:defRPr>
             </a:pPr>
-            <a:endParaRPr sz="1867"/>
+            <a:endParaRPr dirty="0"/>
           </a:p>
           <a:p>
             <a:pPr marL="0" indent="0" algn="l">
@@ -5695,7 +6233,7 @@
               </a:defRPr>
             </a:pPr>
             <a:r>
-              <a:rPr sz="2000" b="0">
+              <a:rPr sz="2800" b="0" dirty="0">
                 <a:solidFill>
                   <a:srgbClr val="1B2944"/>
                 </a:solidFill>
@@ -5703,156 +6241,10 @@
                 <a:ea typeface="Open Sans"/>
                 <a:cs typeface="Open Sans"/>
               </a:rPr>
-              <a:t>Scripts for data processing, analysis and visualisation, sometimes whole small apps. Always: describe precisely, get code, run it, test on a known case, iterate.</a:t>
+              <a:t>Scripts for data processing, analysis and </a:t>
             </a:r>
-            <a:endParaRPr sz="1867"/>
-          </a:p>
-        </p:txBody>
-      </p:sp>
-      <p:sp>
-        <p:nvSpPr>
-          <p:cNvPr id="7" name="Text 5">
-            <a:extLst>
-              <a:ext uri="{FF2B5EF4-FFF2-40B4-BE49-F238E27FC236}">
-                <a16:creationId xmlns:a16="http://schemas.microsoft.com/office/drawing/2014/main" id="{0E144E69-5171-4493-BB5F-D81A13300623}"/>
-              </a:ext>
-            </a:extLst>
-          </p:cNvPr>
-          <p:cNvSpPr>
-            <a:spLocks noGrp="1"/>
-          </p:cNvSpPr>
-          <p:nvPr/>
-        </p:nvSpPr>
-        <p:spPr>
-          <a:xfrm>
-            <a:off x="433705" y="5334000"/>
-            <a:ext cx="11315700" cy="1016000"/>
-          </a:xfrm>
-          <a:prstGeom prst="rect">
-            <a:avLst/>
-          </a:prstGeom>
-          <a:noFill/>
-        </p:spPr>
-        <p:txBody>
-          <a:bodyPr wrap="square" lIns="0" tIns="0" rIns="0" bIns="0" anchor="t">
-            <a:noAutofit/>
-          </a:bodyPr>
-          <a:lstStyle>
-            <a:defPPr algn="l">
-              <a:defRPr sz="1600" b="0">
-                <a:solidFill>
-                  <a:srgbClr val="1B2944"/>
-                </a:solidFill>
-                <a:latin typeface="Open Sans"/>
-                <a:ea typeface="Open Sans"/>
-                <a:cs typeface="Open Sans"/>
-              </a:defRPr>
-            </a:defPPr>
-            <a:lvl1pPr algn="l">
-              <a:defRPr sz="1600" b="0">
-                <a:solidFill>
-                  <a:srgbClr val="1B2944"/>
-                </a:solidFill>
-                <a:latin typeface="Open Sans"/>
-                <a:ea typeface="Open Sans"/>
-                <a:cs typeface="Open Sans"/>
-              </a:defRPr>
-            </a:lvl1pPr>
-            <a:lvl2pPr algn="l">
-              <a:defRPr sz="1600" b="0">
-                <a:solidFill>
-                  <a:srgbClr val="1B2944"/>
-                </a:solidFill>
-                <a:latin typeface="Open Sans"/>
-                <a:ea typeface="Open Sans"/>
-                <a:cs typeface="Open Sans"/>
-              </a:defRPr>
-            </a:lvl2pPr>
-            <a:lvl3pPr algn="l">
-              <a:defRPr sz="1600" b="0">
-                <a:solidFill>
-                  <a:srgbClr val="1B2944"/>
-                </a:solidFill>
-                <a:latin typeface="Open Sans"/>
-                <a:ea typeface="Open Sans"/>
-                <a:cs typeface="Open Sans"/>
-              </a:defRPr>
-            </a:lvl3pPr>
-            <a:lvl4pPr algn="l">
-              <a:defRPr sz="1600" b="0">
-                <a:solidFill>
-                  <a:srgbClr val="1B2944"/>
-                </a:solidFill>
-                <a:latin typeface="Open Sans"/>
-                <a:ea typeface="Open Sans"/>
-                <a:cs typeface="Open Sans"/>
-              </a:defRPr>
-            </a:lvl4pPr>
-            <a:lvl5pPr algn="l">
-              <a:defRPr sz="1600" b="0">
-                <a:solidFill>
-                  <a:srgbClr val="1B2944"/>
-                </a:solidFill>
-                <a:latin typeface="Open Sans"/>
-                <a:ea typeface="Open Sans"/>
-                <a:cs typeface="Open Sans"/>
-              </a:defRPr>
-            </a:lvl5pPr>
-            <a:lvl6pPr algn="l">
-              <a:defRPr sz="1600" b="0">
-                <a:solidFill>
-                  <a:srgbClr val="1B2944"/>
-                </a:solidFill>
-                <a:latin typeface="Open Sans"/>
-                <a:ea typeface="Open Sans"/>
-                <a:cs typeface="Open Sans"/>
-              </a:defRPr>
-            </a:lvl6pPr>
-            <a:lvl7pPr algn="l">
-              <a:defRPr sz="1600" b="0">
-                <a:solidFill>
-                  <a:srgbClr val="1B2944"/>
-                </a:solidFill>
-                <a:latin typeface="Open Sans"/>
-                <a:ea typeface="Open Sans"/>
-                <a:cs typeface="Open Sans"/>
-              </a:defRPr>
-            </a:lvl7pPr>
-            <a:lvl8pPr algn="l">
-              <a:defRPr sz="1600" b="0">
-                <a:solidFill>
-                  <a:srgbClr val="1B2944"/>
-                </a:solidFill>
-                <a:latin typeface="Open Sans"/>
-                <a:ea typeface="Open Sans"/>
-                <a:cs typeface="Open Sans"/>
-              </a:defRPr>
-            </a:lvl8pPr>
-            <a:lvl9pPr algn="l">
-              <a:defRPr sz="1600" b="0">
-                <a:solidFill>
-                  <a:srgbClr val="1B2944"/>
-                </a:solidFill>
-                <a:latin typeface="Open Sans"/>
-                <a:ea typeface="Open Sans"/>
-                <a:cs typeface="Open Sans"/>
-              </a:defRPr>
-            </a:lvl9pPr>
-          </a:lstStyle>
-          <a:p>
-            <a:pPr marL="0" indent="0" algn="l">
-              <a:buNone/>
-              <a:defRPr sz="1600" b="0">
-                <a:solidFill>
-                  <a:srgbClr val="1B2944"/>
-                </a:solidFill>
-                <a:latin typeface="Open Sans"/>
-                <a:ea typeface="Open Sans"/>
-                <a:cs typeface="Open Sans"/>
-              </a:defRPr>
-            </a:pPr>
             <a:r>
-              <a:rPr sz="1600" b="0">
+              <a:rPr sz="2800" b="0" dirty="0" err="1">
                 <a:solidFill>
                   <a:srgbClr val="1B2944"/>
                 </a:solidFill>
@@ -5860,9 +6252,20 @@
                 <a:ea typeface="Open Sans"/>
                 <a:cs typeface="Open Sans"/>
               </a:rPr>
-              <a:t>Example:  a cell that loads a chromatogram, baseline-corrects, detects peaks and plots them, checked against a manual count on one file first.</a:t>
+              <a:t>visualisation</a:t>
             </a:r>
-            <a:endParaRPr sz="1467"/>
+            <a:r>
+              <a:rPr sz="2800" b="0" dirty="0">
+                <a:solidFill>
+                  <a:srgbClr val="1B2944"/>
+                </a:solidFill>
+                <a:latin typeface="Open Sans"/>
+                <a:ea typeface="Open Sans"/>
+                <a:cs typeface="Open Sans"/>
+              </a:rPr>
+              <a:t>, sometimes whole small apps. Always: describe precisely, get code, run it, test on a known case, iterate.</a:t>
+            </a:r>
+            <a:endParaRPr sz="2400" dirty="0"/>
           </a:p>
         </p:txBody>
       </p:sp>
@@ -6361,7 +6764,7 @@
               </a:defRPr>
             </a:pPr>
             <a:r>
-              <a:rPr sz="2000" b="0">
+              <a:rPr sz="2000" b="0" dirty="0">
                 <a:solidFill>
                   <a:srgbClr val="1B2944"/>
                 </a:solidFill>
@@ -6369,9 +6772,31 @@
                 <a:ea typeface="Open Sans"/>
                 <a:cs typeface="Open Sans"/>
               </a:rPr>
-              <a:t>Useful to get oriented, summarise a concept, or suggest search terms.</a:t>
+              <a:t>Useful to get oriented, </a:t>
             </a:r>
-            <a:endParaRPr sz="1867"/>
+            <a:r>
+              <a:rPr sz="2000" b="0" dirty="0" err="1">
+                <a:solidFill>
+                  <a:srgbClr val="1B2944"/>
+                </a:solidFill>
+                <a:latin typeface="Open Sans"/>
+                <a:ea typeface="Open Sans"/>
+                <a:cs typeface="Open Sans"/>
+              </a:rPr>
+              <a:t>summarise</a:t>
+            </a:r>
+            <a:r>
+              <a:rPr sz="2000" b="0" dirty="0">
+                <a:solidFill>
+                  <a:srgbClr val="1B2944"/>
+                </a:solidFill>
+                <a:latin typeface="Open Sans"/>
+                <a:ea typeface="Open Sans"/>
+                <a:cs typeface="Open Sans"/>
+              </a:rPr>
+              <a:t> a concept, or suggest search terms.</a:t>
+            </a:r>
+            <a:endParaRPr sz="1867" dirty="0"/>
           </a:p>
           <a:p>
             <a:pPr marL="0" indent="0" algn="l">
@@ -6385,7 +6810,7 @@
                 <a:cs typeface="Open Sans"/>
               </a:defRPr>
             </a:pPr>
-            <a:endParaRPr sz="1867"/>
+            <a:endParaRPr sz="1867" dirty="0"/>
           </a:p>
           <a:p>
             <a:pPr marL="0" indent="0" algn="l">
@@ -6400,7 +6825,7 @@
               </a:defRPr>
             </a:pPr>
             <a:r>
-              <a:rPr sz="2000" b="0">
+              <a:rPr sz="2000" b="0" dirty="0">
                 <a:solidFill>
                   <a:srgbClr val="C96461"/>
                 </a:solidFill>
@@ -6411,7 +6836,7 @@
               <a:t>Not a citation source:</a:t>
             </a:r>
             <a:r>
-              <a:rPr sz="2000" b="0">
+              <a:rPr sz="2000" b="0" dirty="0">
                 <a:solidFill>
                   <a:srgbClr val="1B2944"/>
                 </a:solidFill>
@@ -6421,7 +6846,7 @@
               </a:rPr>
               <a:t>  every reference must be confirmed in a real database before you use it.</a:t>
             </a:r>
-            <a:endParaRPr sz="1867"/>
+            <a:endParaRPr sz="1867" dirty="0"/>
           </a:p>
         </p:txBody>
       </p:sp>
@@ -7077,7 +7502,7 @@
               </a:defRPr>
             </a:pPr>
             <a:r>
-              <a:rPr sz="2000" b="0">
+              <a:rPr sz="2000" b="0" dirty="0">
                 <a:solidFill>
                   <a:srgbClr val="1B2944"/>
                 </a:solidFill>
@@ -7087,7 +7512,7 @@
               </a:rPr>
               <a:t>LLMs help draft, restructure and tidy reports, method sections, captions and repetitive text.</a:t>
             </a:r>
-            <a:endParaRPr sz="1867"/>
+            <a:endParaRPr sz="1867" dirty="0"/>
           </a:p>
           <a:p>
             <a:pPr marL="0" indent="0" algn="l">
@@ -7101,7 +7526,7 @@
                 <a:cs typeface="Open Sans"/>
               </a:defRPr>
             </a:pPr>
-            <a:endParaRPr sz="1867"/>
+            <a:endParaRPr sz="1867" dirty="0"/>
           </a:p>
           <a:p>
             <a:pPr marL="0" indent="0" algn="l">
@@ -7116,9 +7541,9 @@
               </a:defRPr>
             </a:pPr>
             <a:r>
-              <a:rPr sz="2000" b="0">
-                <a:solidFill>
-                  <a:srgbClr val="417ECE"/>
+              <a:rPr sz="2000" b="1" dirty="0">
+                <a:solidFill>
+                  <a:schemeClr val="tx1"/>
                 </a:solidFill>
                 <a:latin typeface="Open Sans"/>
                 <a:ea typeface="Open Sans"/>
@@ -7127,7 +7552,7 @@
               <a:t>The author stays responsible</a:t>
             </a:r>
             <a:r>
-              <a:rPr sz="2000" b="0">
+              <a:rPr sz="2000" b="0" dirty="0">
                 <a:solidFill>
                   <a:srgbClr val="1B2944"/>
                 </a:solidFill>
@@ -7137,7 +7562,7 @@
               </a:rPr>
               <a:t> for all content, including every claim and number.</a:t>
             </a:r>
-            <a:endParaRPr sz="1867"/>
+            <a:endParaRPr sz="1867" dirty="0"/>
           </a:p>
         </p:txBody>
       </p:sp>
@@ -7636,7 +8061,7 @@
               </a:defRPr>
             </a:pPr>
             <a:r>
-              <a:rPr sz="3000" b="0" spc="0">
+              <a:rPr lang="en-US" sz="3000" b="0" spc="0" dirty="0">
                 <a:solidFill>
                   <a:srgbClr val="1B2944"/>
                 </a:solidFill>
@@ -7644,9 +8069,9 @@
                 <a:ea typeface="Aptos SemiBold"/>
                 <a:cs typeface="Aptos SemiBold"/>
               </a:rPr>
-              <a:t>Key takeaways</a:t>
+              <a:t>Conclusions</a:t>
             </a:r>
-            <a:endParaRPr sz="1733"/>
+            <a:endParaRPr sz="1733" dirty="0"/>
           </a:p>
         </p:txBody>
       </p:sp>
